--- a/HydroNet_Chittagong_Resilience_Final.pptx
+++ b/HydroNet_Chittagong_Resilience_Final.pptx
@@ -7864,7 +7864,7 @@
                   <a:srgbClr val="2D3D4F"/>
                 </a:solidFill>
               </a:rPr>
-              <a:t>ID: 0242210005048</a:t>
+              <a:t>ID: 2103910202114</a:t>
             </a:r>
           </a:p>
           <a:p>
@@ -7986,7 +7986,7 @@
                   <a:srgbClr val="2D3D4F"/>
                 </a:solidFill>
               </a:rPr>
-              <a:t>ID: 0242210005051</a:t>
+              <a:t>ID: 0222320005101088</a:t>
             </a:r>
           </a:p>
           <a:p>
@@ -8108,7 +8108,7 @@
                   <a:srgbClr val="2D3D4F"/>
                 </a:solidFill>
               </a:rPr>
-              <a:t>ID: 0242210005055</a:t>
+              <a:t>ID: 0222220005101143</a:t>
             </a:r>
           </a:p>
           <a:p>
